--- a/data/auto_synced/Investor_Pitch_25MT_Uttar_Pradesh.pptx
+++ b/data/auto_synced/Investor_Pitch_25MT_Uttar_Pradesh.pptx
@@ -3137,7 +3137,7 @@
           </a:p>
           <a:p>
             <a:r>
-              <a:t>Investment: Rs 10.00 Crore | IRR: 34.3%</a:t>
+              <a:t>Investment: Rs 10.00 Crore | IRR: 26.1%</a:t>
             </a:r>
           </a:p>
           <a:p>
@@ -3287,32 +3287,32 @@
           </a:p>
           <a:p>
             <a:r>
-              <a:t>• Equity Required: Rs 4.00 Crore</a:t>
-            </a:r>
-          </a:p>
-          <a:p>
-            <a:r>
-              <a:t>• Bank Loan: Rs 6.00 Crore</a:t>
-            </a:r>
-          </a:p>
-          <a:p>
-            <a:r>
-              <a:t>• Annual Revenue (Yr5): Rs 1061 Lakhs</a:t>
-            </a:r>
-          </a:p>
-          <a:p>
-            <a:r>
-              <a:t>• ROI: 21.9% | IRR: 34.3%</a:t>
-            </a:r>
-          </a:p>
-          <a:p>
-            <a:r>
-              <a:t>• Break-Even: 52 months</a:t>
-            </a:r>
-          </a:p>
-          <a:p>
-            <a:r>
-              <a:t>• DSCR: 2.01x</a:t>
+              <a:t>• Equity Required: Rs 5.00 Crore</a:t>
+            </a:r>
+          </a:p>
+          <a:p>
+            <a:r>
+              <a:t>• Bank Loan: Rs 5.00 Crore</a:t>
+            </a:r>
+          </a:p>
+          <a:p>
+            <a:r>
+              <a:t>• Annual Revenue (Yr5): Rs 1026 Lakhs</a:t>
+            </a:r>
+          </a:p>
+          <a:p>
+            <a:r>
+              <a:t>• ROI: 20.6% | IRR: 26.1%</a:t>
+            </a:r>
+          </a:p>
+          <a:p>
+            <a:r>
+              <a:t>• Break-Even: 54 months</a:t>
+            </a:r>
+          </a:p>
+          <a:p>
+            <a:r>
+              <a:t>• DSCR: 2.14x</a:t>
             </a:r>
           </a:p>
         </p:txBody>
@@ -3547,27 +3547,27 @@
           </a:p>
           <a:p>
             <a:r>
-              <a:t>Yr1 | Rs 499L | Rs 192L | Rs 17L | 0.94x</a:t>
-            </a:r>
-          </a:p>
-          <a:p>
-            <a:r>
-              <a:t>Yr2 | Rs 686L | Rs 282L | Rs 85L | 1.47x</a:t>
-            </a:r>
-          </a:p>
-          <a:p>
-            <a:r>
-              <a:t>Yr3 | Rs 873L | Rs 371L | Rs 152L | 2.01x</a:t>
-            </a:r>
-          </a:p>
-          <a:p>
-            <a:r>
-              <a:t>Yr4 | Rs 998L | Rs 431L | Rs 196L | 2.37x</a:t>
-            </a:r>
-          </a:p>
-          <a:p>
-            <a:r>
-              <a:t>Yr5 | Rs 1061L | Rs 461L | Rs 219L | 2.55x</a:t>
+              <a:t>Yr1 | Rs 483L | Rs 184L | Rs 11L | 0.99x</a:t>
+            </a:r>
+          </a:p>
+          <a:p>
+            <a:r>
+              <a:t>Yr2 | Rs 664L | Rs 271L | Rs 76L | 1.56x</a:t>
+            </a:r>
+          </a:p>
+          <a:p>
+            <a:r>
+              <a:t>Yr3 | Rs 845L | Rs 358L | Rs 141L | 2.14x</a:t>
+            </a:r>
+          </a:p>
+          <a:p>
+            <a:r>
+              <a:t>Yr4 | Rs 966L | Rs 416L | Rs 184L | 2.53x</a:t>
+            </a:r>
+          </a:p>
+          <a:p>
+            <a:r>
+              <a:t>Yr5 | Rs 1026L | Rs 444L | Rs 206L | 2.72x</a:t>
             </a:r>
           </a:p>
           <a:p/>
@@ -3643,12 +3643,12 @@
           </a:p>
           <a:p>
             <a:r>
-              <a:t>• Expected equity IRR: 34.3%</a:t>
-            </a:r>
-          </a:p>
-          <a:p>
-            <a:r>
-              <a:t>• Payback period: 52 months</a:t>
+              <a:t>• Expected equity IRR: 26.1%</a:t>
+            </a:r>
+          </a:p>
+          <a:p>
+            <a:r>
+              <a:t>• Payback period: 54 months</a:t>
             </a:r>
           </a:p>
         </p:txBody>
